--- a/skills/presentation-template-library/skills/artifact-template-midnight-prospectus/assets/reference.pptx
+++ b/skills/presentation-template-library/skills/artifact-template-midnight-prospectus/assets/reference.pptx
@@ -5416,7 +5416,7 @@
         </p:xfrm>
         <a:graphic xmlns:a="http://schemas.openxmlformats.org/drawingml/2006/main">
           <a:graphicData uri="http://schemas.openxmlformats.org/drawingml/2006/chart">
-            <c:chart xmlns:r="http://schemas.openxmlformats.org/officeDocument/2006/relationships" xmlns:c="http://schemas.openxmlformats.org/drawingml/2006/chart" r:id="R13f3b70e2a114cb1"/>
+            <c:chart xmlns:r="http://schemas.openxmlformats.org/officeDocument/2006/relationships" xmlns:c="http://schemas.openxmlformats.org/drawingml/2006/chart" r:id="Rb7252c4fd4a948ad"/>
           </a:graphicData>
         </a:graphic>
       </p:graphicFrame>
@@ -5434,7 +5434,7 @@
         </p:xfrm>
         <a:graphic xmlns:a="http://schemas.openxmlformats.org/drawingml/2006/main">
           <a:graphicData uri="http://schemas.openxmlformats.org/drawingml/2006/chart">
-            <c:chart xmlns:r="http://schemas.openxmlformats.org/officeDocument/2006/relationships" xmlns:c="http://schemas.openxmlformats.org/drawingml/2006/chart" r:id="R62ac682f0d29416f"/>
+            <c:chart xmlns:r="http://schemas.openxmlformats.org/officeDocument/2006/relationships" xmlns:c="http://schemas.openxmlformats.org/drawingml/2006/chart" r:id="R9656400848d54c81"/>
           </a:graphicData>
         </a:graphic>
       </p:graphicFrame>

--- a/skills/presentation-template-library/skills/artifact-template-midnight-prospectus/assets/reference.pptx
+++ b/skills/presentation-template-library/skills/artifact-template-midnight-prospectus/assets/reference.pptx
@@ -5416,7 +5416,7 @@
         </p:xfrm>
         <a:graphic xmlns:a="http://schemas.openxmlformats.org/drawingml/2006/main">
           <a:graphicData uri="http://schemas.openxmlformats.org/drawingml/2006/chart">
-            <c:chart xmlns:r="http://schemas.openxmlformats.org/officeDocument/2006/relationships" xmlns:c="http://schemas.openxmlformats.org/drawingml/2006/chart" r:id="Rb7252c4fd4a948ad"/>
+            <c:chart xmlns:r="http://schemas.openxmlformats.org/officeDocument/2006/relationships" xmlns:c="http://schemas.openxmlformats.org/drawingml/2006/chart" r:id="Rea5c9dc9ebc84f1a"/>
           </a:graphicData>
         </a:graphic>
       </p:graphicFrame>
@@ -5434,7 +5434,7 @@
         </p:xfrm>
         <a:graphic xmlns:a="http://schemas.openxmlformats.org/drawingml/2006/main">
           <a:graphicData uri="http://schemas.openxmlformats.org/drawingml/2006/chart">
-            <c:chart xmlns:r="http://schemas.openxmlformats.org/officeDocument/2006/relationships" xmlns:c="http://schemas.openxmlformats.org/drawingml/2006/chart" r:id="R9656400848d54c81"/>
+            <c:chart xmlns:r="http://schemas.openxmlformats.org/officeDocument/2006/relationships" xmlns:c="http://schemas.openxmlformats.org/drawingml/2006/chart" r:id="Rb1d925da59644012"/>
           </a:graphicData>
         </a:graphic>
       </p:graphicFrame>

--- a/skills/presentation-template-library/skills/artifact-template-midnight-prospectus/assets/reference.pptx
+++ b/skills/presentation-template-library/skills/artifact-template-midnight-prospectus/assets/reference.pptx
@@ -5416,7 +5416,7 @@
         </p:xfrm>
         <a:graphic xmlns:a="http://schemas.openxmlformats.org/drawingml/2006/main">
           <a:graphicData uri="http://schemas.openxmlformats.org/drawingml/2006/chart">
-            <c:chart xmlns:r="http://schemas.openxmlformats.org/officeDocument/2006/relationships" xmlns:c="http://schemas.openxmlformats.org/drawingml/2006/chart" r:id="Rea5c9dc9ebc84f1a"/>
+            <c:chart xmlns:r="http://schemas.openxmlformats.org/officeDocument/2006/relationships" xmlns:c="http://schemas.openxmlformats.org/drawingml/2006/chart" r:id="Rb428744539164600"/>
           </a:graphicData>
         </a:graphic>
       </p:graphicFrame>
@@ -5434,7 +5434,7 @@
         </p:xfrm>
         <a:graphic xmlns:a="http://schemas.openxmlformats.org/drawingml/2006/main">
           <a:graphicData uri="http://schemas.openxmlformats.org/drawingml/2006/chart">
-            <c:chart xmlns:r="http://schemas.openxmlformats.org/officeDocument/2006/relationships" xmlns:c="http://schemas.openxmlformats.org/drawingml/2006/chart" r:id="Rb1d925da59644012"/>
+            <c:chart xmlns:r="http://schemas.openxmlformats.org/officeDocument/2006/relationships" xmlns:c="http://schemas.openxmlformats.org/drawingml/2006/chart" r:id="Rc9581ed222c843f3"/>
           </a:graphicData>
         </a:graphic>
       </p:graphicFrame>

--- a/skills/presentation-template-library/skills/artifact-template-midnight-prospectus/assets/reference.pptx
+++ b/skills/presentation-template-library/skills/artifact-template-midnight-prospectus/assets/reference.pptx
@@ -418,6 +418,16 @@
 <file path=ppt/slides/slide1.xml><?xml version="1.0" encoding="utf-8"?>
 <p:sld xmlns:p="http://schemas.openxmlformats.org/presentationml/2006/main">
   <p:cSld name="Opening proposition">
+    <p:bg>
+      <p:bgPr>
+        <a:blipFill xmlns:a="http://schemas.openxmlformats.org/drawingml/2006/main">
+          <a:blip xmlns:r="http://schemas.openxmlformats.org/officeDocument/2006/relationships" r:embed="rIdOfficeKitImagee307d6c31b3d1e07_1"/>
+          <a:stretch>
+            <a:fillRect/>
+          </a:stretch>
+        </a:blipFill>
+      </p:bgPr>
+    </p:bg>
     <p:spTree>
       <p:nvGrpSpPr>
         <p:cNvPr id="1" name=""/>
@@ -434,7 +444,7 @@
       </p:grpSpPr>
       <p:sp>
         <p:nvSpPr>
-          <p:cNvPr id="2" name="dark-field"/>
+          <p:cNvPr id="2" name="cover-photo-scrim"/>
           <p:cNvSpPr/>
           <p:nvPr/>
         </p:nvSpPr>
@@ -447,7 +457,9 @@
             <a:avLst/>
           </a:prstGeom>
           <a:solidFill xmlns:a="http://schemas.openxmlformats.org/drawingml/2006/main">
-            <a:srgbClr val="112A3C"/>
+            <a:srgbClr val="112A3C">
+              <a:alpha val="58000"/>
+            </a:srgbClr>
           </a:solidFill>
           <a:ln xmlns:a="http://schemas.openxmlformats.org/drawingml/2006/main" w="0">
             <a:solidFill>
@@ -470,7 +482,45 @@
       </p:sp>
       <p:sp>
         <p:nvSpPr>
-          <p:cNvPr id="3" name="cover-evidence-field"/>
+          <p:cNvPr id="3" name="cover-reading-plane"/>
+          <p:cNvSpPr/>
+          <p:nvPr/>
+        </p:nvSpPr>
+        <p:spPr>
+          <a:xfrm xmlns:a="http://schemas.openxmlformats.org/drawingml/2006/main">
+            <a:off x="0" y="0"/>
+            <a:ext cx="8191500" cy="8572500"/>
+          </a:xfrm>
+          <a:prstGeom xmlns:a="http://schemas.openxmlformats.org/drawingml/2006/main" prst="rect">
+            <a:avLst/>
+          </a:prstGeom>
+          <a:solidFill xmlns:a="http://schemas.openxmlformats.org/drawingml/2006/main">
+            <a:srgbClr val="112A3C">
+              <a:alpha val="78000"/>
+            </a:srgbClr>
+          </a:solidFill>
+          <a:ln xmlns:a="http://schemas.openxmlformats.org/drawingml/2006/main" w="0">
+            <a:solidFill>
+              <a:srgbClr val="112A3C"/>
+            </a:solidFill>
+            <a:prstDash val="solid"/>
+          </a:ln>
+        </p:spPr>
+        <p:txBody>
+          <a:bodyPr xmlns:a="http://schemas.openxmlformats.org/drawingml/2006/main" wrap="square" lIns="0" tIns="0" rIns="0" bIns="0" anchor="t"/>
+          <a:lstStyle xmlns:a="http://schemas.openxmlformats.org/drawingml/2006/main"/>
+          <a:p xmlns:a="http://schemas.openxmlformats.org/drawingml/2006/main">
+            <a:r>
+              <a:rPr lang="en-US"/>
+              <a:t/>
+            </a:r>
+            <a:endParaRPr lang="en-US"/>
+          </a:p>
+        </p:txBody>
+      </p:sp>
+      <p:sp>
+        <p:nvSpPr>
+          <p:cNvPr id="4" name="cover-evidence-field"/>
           <p:cNvSpPr/>
           <p:nvPr/>
         </p:nvSpPr>
@@ -508,7 +558,7 @@
       </p:sp>
       <p:sp>
         <p:nvSpPr>
-          <p:cNvPr id="4" name="cover-gold-line"/>
+          <p:cNvPr id="5" name="cover-gold-line"/>
           <p:cNvSpPr/>
           <p:nvPr/>
         </p:nvSpPr>
@@ -542,7 +592,7 @@
       </p:sp>
       <p:sp>
         <p:nvSpPr>
-          <p:cNvPr id="5" name="eyebrow"/>
+          <p:cNvPr id="6" name="eyebrow"/>
           <p:cNvSpPr txBox="1"/>
           <p:nvPr/>
         </p:nvSpPr>
@@ -579,7 +629,7 @@
       </p:sp>
       <p:sp>
         <p:nvSpPr>
-          <p:cNvPr id="6" name="cover-date"/>
+          <p:cNvPr id="7" name="cover-date"/>
           <p:cNvSpPr txBox="1"/>
           <p:nvPr/>
         </p:nvSpPr>
@@ -617,7 +667,7 @@
       </p:sp>
       <p:sp>
         <p:nvSpPr>
-          <p:cNvPr id="7" name="cover-title"/>
+          <p:cNvPr id="8" name="cover-title"/>
           <p:cNvSpPr txBox="1"/>
           <p:nvPr/>
         </p:nvSpPr>
@@ -654,7 +704,7 @@
       </p:sp>
       <p:sp>
         <p:nvSpPr>
-          <p:cNvPr id="8" name="cover-subtitle"/>
+          <p:cNvPr id="9" name="cover-subtitle"/>
           <p:cNvSpPr txBox="1"/>
           <p:nvPr/>
         </p:nvSpPr>
@@ -691,7 +741,7 @@
       </p:sp>
       <p:sp>
         <p:nvSpPr>
-          <p:cNvPr id="9" name="cover-thesis"/>
+          <p:cNvPr id="10" name="cover-thesis"/>
           <p:cNvSpPr txBox="1"/>
           <p:nvPr/>
         </p:nvSpPr>
@@ -728,7 +778,7 @@
       </p:sp>
       <p:sp>
         <p:nvSpPr>
-          <p:cNvPr id="10" name="cover-metric-one"/>
+          <p:cNvPr id="11" name="cover-metric-one"/>
           <p:cNvSpPr txBox="1"/>
           <p:nvPr/>
         </p:nvSpPr>
@@ -765,7 +815,7 @@
       </p:sp>
       <p:sp>
         <p:nvSpPr>
-          <p:cNvPr id="11" name="cover-metric-one-caption"/>
+          <p:cNvPr id="12" name="cover-metric-one-caption"/>
           <p:cNvSpPr txBox="1"/>
           <p:nvPr/>
         </p:nvSpPr>
@@ -802,7 +852,7 @@
       </p:sp>
       <p:sp>
         <p:nvSpPr>
-          <p:cNvPr id="12" name="cover-metric-two"/>
+          <p:cNvPr id="13" name="cover-metric-two"/>
           <p:cNvSpPr txBox="1"/>
           <p:nvPr/>
         </p:nvSpPr>
@@ -839,7 +889,7 @@
       </p:sp>
       <p:sp>
         <p:nvSpPr>
-          <p:cNvPr id="13" name="cover-metric-two-caption"/>
+          <p:cNvPr id="14" name="cover-metric-two-caption"/>
           <p:cNvSpPr txBox="1"/>
           <p:nvPr/>
         </p:nvSpPr>
@@ -876,7 +926,7 @@
       </p:sp>
       <p:sp>
         <p:nvSpPr>
-          <p:cNvPr id="14" name="cover-metric-three"/>
+          <p:cNvPr id="15" name="cover-metric-three"/>
           <p:cNvSpPr txBox="1"/>
           <p:nvPr/>
         </p:nvSpPr>
@@ -913,7 +963,7 @@
       </p:sp>
       <p:sp>
         <p:nvSpPr>
-          <p:cNvPr id="15" name="cover-metric-three-caption"/>
+          <p:cNvPr id="16" name="cover-metric-three-caption"/>
           <p:cNvSpPr txBox="1"/>
           <p:nvPr/>
         </p:nvSpPr>
@@ -950,7 +1000,7 @@
       </p:sp>
       <p:sp>
         <p:nvSpPr>
-          <p:cNvPr id="16" name="cover-watermark"/>
+          <p:cNvPr id="17" name="cover-watermark"/>
           <p:cNvSpPr txBox="1"/>
           <p:nvPr/>
         </p:nvSpPr>
@@ -987,7 +1037,7 @@
       </p:sp>
       <p:sp>
         <p:nvSpPr>
-          <p:cNvPr id="17" name="basis-band"/>
+          <p:cNvPr id="18" name="basis-band"/>
           <p:cNvSpPr/>
           <p:nvPr/>
         </p:nvSpPr>
@@ -1025,7 +1075,7 @@
       </p:sp>
       <p:sp>
         <p:nvSpPr>
-          <p:cNvPr id="18" name="basis-band-text"/>
+          <p:cNvPr id="19" name="basis-band-text"/>
           <p:cNvSpPr txBox="1"/>
           <p:nvPr/>
         </p:nvSpPr>
@@ -1062,7 +1112,7 @@
       </p:sp>
       <p:sp>
         <p:nvSpPr>
-          <p:cNvPr id="19" name="page-number"/>
+          <p:cNvPr id="20" name="page-number"/>
           <p:cNvSpPr txBox="1"/>
           <p:nvPr/>
         </p:nvSpPr>
@@ -5416,7 +5466,7 @@
         </p:xfrm>
         <a:graphic xmlns:a="http://schemas.openxmlformats.org/drawingml/2006/main">
           <a:graphicData uri="http://schemas.openxmlformats.org/drawingml/2006/chart">
-            <c:chart xmlns:r="http://schemas.openxmlformats.org/officeDocument/2006/relationships" xmlns:c="http://schemas.openxmlformats.org/drawingml/2006/chart" r:id="Rb428744539164600"/>
+            <c:chart xmlns:r="http://schemas.openxmlformats.org/officeDocument/2006/relationships" xmlns:c="http://schemas.openxmlformats.org/drawingml/2006/chart" r:id="R51801dbaebab4ae9"/>
           </a:graphicData>
         </a:graphic>
       </p:graphicFrame>
@@ -5434,7 +5484,7 @@
         </p:xfrm>
         <a:graphic xmlns:a="http://schemas.openxmlformats.org/drawingml/2006/main">
           <a:graphicData uri="http://schemas.openxmlformats.org/drawingml/2006/chart">
-            <c:chart xmlns:r="http://schemas.openxmlformats.org/officeDocument/2006/relationships" xmlns:c="http://schemas.openxmlformats.org/drawingml/2006/chart" r:id="Rc9581ed222c843f3"/>
+            <c:chart xmlns:r="http://schemas.openxmlformats.org/officeDocument/2006/relationships" xmlns:c="http://schemas.openxmlformats.org/drawingml/2006/chart" r:id="Rf91c8669341241ea"/>
           </a:graphicData>
         </a:graphic>
       </p:graphicFrame>

--- a/skills/presentation-template-library/skills/artifact-template-midnight-prospectus/assets/reference.pptx
+++ b/skills/presentation-template-library/skills/artifact-template-midnight-prospectus/assets/reference.pptx
@@ -5466,7 +5466,7 @@
         </p:xfrm>
         <a:graphic xmlns:a="http://schemas.openxmlformats.org/drawingml/2006/main">
           <a:graphicData uri="http://schemas.openxmlformats.org/drawingml/2006/chart">
-            <c:chart xmlns:r="http://schemas.openxmlformats.org/officeDocument/2006/relationships" xmlns:c="http://schemas.openxmlformats.org/drawingml/2006/chart" r:id="R51801dbaebab4ae9"/>
+            <c:chart xmlns:r="http://schemas.openxmlformats.org/officeDocument/2006/relationships" xmlns:c="http://schemas.openxmlformats.org/drawingml/2006/chart" r:id="R1da83aba11f540ec"/>
           </a:graphicData>
         </a:graphic>
       </p:graphicFrame>
@@ -5484,7 +5484,7 @@
         </p:xfrm>
         <a:graphic xmlns:a="http://schemas.openxmlformats.org/drawingml/2006/main">
           <a:graphicData uri="http://schemas.openxmlformats.org/drawingml/2006/chart">
-            <c:chart xmlns:r="http://schemas.openxmlformats.org/officeDocument/2006/relationships" xmlns:c="http://schemas.openxmlformats.org/drawingml/2006/chart" r:id="Rf91c8669341241ea"/>
+            <c:chart xmlns:r="http://schemas.openxmlformats.org/officeDocument/2006/relationships" xmlns:c="http://schemas.openxmlformats.org/drawingml/2006/chart" r:id="R4a8079ab69a84bf4"/>
           </a:graphicData>
         </a:graphic>
       </p:graphicFrame>
